--- a/assets/powerpoints/module-n2-inscription/A1-je-voudrais-m-inscrire.pptx
+++ b/assets/powerpoints/module-n2-inscription/A1-je-voudrais-m-inscrire.pptx
@@ -12102,7 +12102,25 @@
                 </a:solidFill>
                 <a:latin typeface="Verdana"/>
               </a:rPr>
-              <a:t>On dit d'abord &lt;b&gt;bonjour&lt;/b&gt;, puis ce qu'on veut, puis on attend. Personne n'a besoin de plus. « Je voudrais » est plus poli que « je veux », et c'est la forme qu'on entend partout au comptoir.</a:t>
+              <a:t>On dit d'abord </a:t>
+            </a:r>
+            <a:r>
+              <a:rPr sz="2000" b="1" i="0">
+                <a:solidFill>
+                  <a:srgbClr val="4B4F52"/>
+                </a:solidFill>
+                <a:latin typeface="Verdana"/>
+              </a:rPr>
+              <a:t>bonjour</a:t>
+            </a:r>
+            <a:r>
+              <a:rPr sz="2000" b="0" i="0">
+                <a:solidFill>
+                  <a:srgbClr val="4B4F52"/>
+                </a:solidFill>
+                <a:latin typeface="Verdana"/>
+              </a:rPr>
+              <a:t>, puis ce qu'on veut, puis on attend. Personne n'a besoin de plus. « Je voudrais » est plus poli que « je veux », et c'est la forme qu'on entend partout au comptoir.</a:t>
             </a:r>
           </a:p>
         </p:txBody>
